--- a/SQLTUNING/SQL튜닝_Ch13_교안.pptx
+++ b/SQLTUNING/SQL튜닝_Ch13_교안.pptx
@@ -8806,7 +8806,7 @@
                 </a:solidFill>
                 <a:latin typeface="Consolas"/>
               </a:rPr>
-              <a:t>| hosp_id=1 (스큐)   |  3,470 |  3,058 | 근접 (비율 약 1.13배) |</a:t>
+              <a:t>| hosp_id=1 (스큐)   |  2,795 |  3,058 | 근접 (비율 약 0.91배) |</a:t>
             </a:r>
           </a:p>
           <a:p>
@@ -8817,7 +8817,7 @@
                 </a:solidFill>
                 <a:latin typeface="Consolas"/>
               </a:rPr>
-              <a:t>| hosp_id=500 (일반) |    159 |    177 | 근접 (비율 약 0.90배) |</a:t>
+              <a:t>| hosp_id=500 (일반) |    280 |    177 | 근접 (비율 약 1.58배) |</a:t>
             </a:r>
           </a:p>
         </p:txBody>
@@ -11447,7 +11447,7 @@
                 </a:solidFill>
                 <a:latin typeface="Consolas"/>
               </a:rPr>
-              <a:t>| hosp_id=1 (스큐, 복원 후) |  3,285 |  3,058 | 근접 (비율 약 1.07배) |</a:t>
+              <a:t>| hosp_id=1 (스큐, 복원 후) |  2,958 |  3,058 | 근접 (비율 약 0.97배) |</a:t>
             </a:r>
           </a:p>
         </p:txBody>
@@ -11596,7 +11596,7 @@
                 </a:solidFill>
                 <a:latin typeface="Malgun Gothic"/>
               </a:rPr>
-              <a:t>    –  복원 후 hosp_id=1의 E-Rows는 3,285 — 원래 베이스라인은 3,470</a:t>
+              <a:t>    –  복원 후 hosp_id=1의 E-Rows는 2,958 — 원래 베이스라인은 2,795</a:t>
             </a:r>
           </a:p>
           <a:p>
@@ -12281,7 +12281,7 @@
                 </a:solidFill>
                 <a:latin typeface="Consolas"/>
               </a:rPr>
-              <a:t>| 히스토그램 있음 (원본)   |            3,470 |                159 | 다름 (스큐 반영) |</a:t>
+              <a:t>| 히스토그램 있음 (원본)   |            2,795 |                280 | 다름 (스큐 반영) |</a:t>
             </a:r>
           </a:p>
           <a:p>
@@ -12303,7 +12303,7 @@
                 </a:solidFill>
                 <a:latin typeface="Consolas"/>
               </a:rPr>
-              <a:t>| 히스토그램 복원 (AUTO)   |            3,285 |       재측정 안 함 | 다시 다름        |</a:t>
+              <a:t>| 히스토그램 복원 (AUTO)   |            2,958 |                158 | 다시 다름        |</a:t>
             </a:r>
           </a:p>
         </p:txBody>
